--- a/etc/PosterSheet.pptx
+++ b/etc/PosterSheet.pptx
@@ -7,10 +7,11 @@
   <p:sldIdLst>
     <p:sldId id="256" r:id="rId2"/>
     <p:sldId id="257" r:id="rId3"/>
-    <p:sldId id="258" r:id="rId4"/>
+    <p:sldId id="259" r:id="rId4"/>
+    <p:sldId id="258" r:id="rId5"/>
   </p:sldIdLst>
   <p:sldSz cx="12192000" cy="6858000"/>
-  <p:notesSz cx="6858000" cy="9144000"/>
+  <p:notesSz cx="6954838" cy="9309100"/>
   <p:defaultTextStyle>
     <a:defPPr>
       <a:defRPr lang="en-US"/>
@@ -106,6 +107,11 @@
       </a:defRPr>
     </a:lvl9pPr>
   </p:defaultTextStyle>
+  <p:extLst>
+    <p:ext uri="{EFAFB233-063F-42B5-8137-9DF3F51BA10A}">
+      <p15:sldGuideLst xmlns:p15="http://schemas.microsoft.com/office/powerpoint/2012/main"/>
+    </p:ext>
+  </p:extLst>
 </p:presentation>
 </file>
 
@@ -256,7 +262,7 @@
           <a:p>
             <a:fld id="{1904A91C-495A-413E-9FFC-C3EB9A8C7B65}" type="datetimeFigureOut">
               <a:rPr lang="en-US" smtClean="0"/>
-              <a:t>6/17/2022</a:t>
+              <a:t>6/25/2025</a:t>
             </a:fld>
             <a:endParaRPr lang="en-US"/>
           </a:p>
@@ -454,7 +460,7 @@
           <a:p>
             <a:fld id="{1904A91C-495A-413E-9FFC-C3EB9A8C7B65}" type="datetimeFigureOut">
               <a:rPr lang="en-US" smtClean="0"/>
-              <a:t>6/17/2022</a:t>
+              <a:t>6/25/2025</a:t>
             </a:fld>
             <a:endParaRPr lang="en-US"/>
           </a:p>
@@ -662,7 +668,7 @@
           <a:p>
             <a:fld id="{1904A91C-495A-413E-9FFC-C3EB9A8C7B65}" type="datetimeFigureOut">
               <a:rPr lang="en-US" smtClean="0"/>
-              <a:t>6/17/2022</a:t>
+              <a:t>6/25/2025</a:t>
             </a:fld>
             <a:endParaRPr lang="en-US"/>
           </a:p>
@@ -860,7 +866,7 @@
           <a:p>
             <a:fld id="{1904A91C-495A-413E-9FFC-C3EB9A8C7B65}" type="datetimeFigureOut">
               <a:rPr lang="en-US" smtClean="0"/>
-              <a:t>6/17/2022</a:t>
+              <a:t>6/25/2025</a:t>
             </a:fld>
             <a:endParaRPr lang="en-US"/>
           </a:p>
@@ -1135,7 +1141,7 @@
           <a:p>
             <a:fld id="{1904A91C-495A-413E-9FFC-C3EB9A8C7B65}" type="datetimeFigureOut">
               <a:rPr lang="en-US" smtClean="0"/>
-              <a:t>6/17/2022</a:t>
+              <a:t>6/25/2025</a:t>
             </a:fld>
             <a:endParaRPr lang="en-US"/>
           </a:p>
@@ -1400,7 +1406,7 @@
           <a:p>
             <a:fld id="{1904A91C-495A-413E-9FFC-C3EB9A8C7B65}" type="datetimeFigureOut">
               <a:rPr lang="en-US" smtClean="0"/>
-              <a:t>6/17/2022</a:t>
+              <a:t>6/25/2025</a:t>
             </a:fld>
             <a:endParaRPr lang="en-US"/>
           </a:p>
@@ -1812,7 +1818,7 @@
           <a:p>
             <a:fld id="{1904A91C-495A-413E-9FFC-C3EB9A8C7B65}" type="datetimeFigureOut">
               <a:rPr lang="en-US" smtClean="0"/>
-              <a:t>6/17/2022</a:t>
+              <a:t>6/25/2025</a:t>
             </a:fld>
             <a:endParaRPr lang="en-US"/>
           </a:p>
@@ -1953,7 +1959,7 @@
           <a:p>
             <a:fld id="{1904A91C-495A-413E-9FFC-C3EB9A8C7B65}" type="datetimeFigureOut">
               <a:rPr lang="en-US" smtClean="0"/>
-              <a:t>6/17/2022</a:t>
+              <a:t>6/25/2025</a:t>
             </a:fld>
             <a:endParaRPr lang="en-US"/>
           </a:p>
@@ -2066,7 +2072,7 @@
           <a:p>
             <a:fld id="{1904A91C-495A-413E-9FFC-C3EB9A8C7B65}" type="datetimeFigureOut">
               <a:rPr lang="en-US" smtClean="0"/>
-              <a:t>6/17/2022</a:t>
+              <a:t>6/25/2025</a:t>
             </a:fld>
             <a:endParaRPr lang="en-US"/>
           </a:p>
@@ -2377,7 +2383,7 @@
           <a:p>
             <a:fld id="{1904A91C-495A-413E-9FFC-C3EB9A8C7B65}" type="datetimeFigureOut">
               <a:rPr lang="en-US" smtClean="0"/>
-              <a:t>6/17/2022</a:t>
+              <a:t>6/25/2025</a:t>
             </a:fld>
             <a:endParaRPr lang="en-US"/>
           </a:p>
@@ -2665,7 +2671,7 @@
           <a:p>
             <a:fld id="{1904A91C-495A-413E-9FFC-C3EB9A8C7B65}" type="datetimeFigureOut">
               <a:rPr lang="en-US" smtClean="0"/>
-              <a:t>6/17/2022</a:t>
+              <a:t>6/25/2025</a:t>
             </a:fld>
             <a:endParaRPr lang="en-US"/>
           </a:p>
@@ -2906,7 +2912,7 @@
           <a:p>
             <a:fld id="{1904A91C-495A-413E-9FFC-C3EB9A8C7B65}" type="datetimeFigureOut">
               <a:rPr lang="en-US" smtClean="0"/>
-              <a:t>6/17/2022</a:t>
+              <a:t>6/25/2025</a:t>
             </a:fld>
             <a:endParaRPr lang="en-US"/>
           </a:p>
@@ -4473,7 +4479,7 @@
         </p:blipFill>
         <p:spPr>
           <a:xfrm>
-            <a:off x="1003361" y="33337"/>
+            <a:off x="1057150" y="33337"/>
             <a:ext cx="10549772" cy="6791325"/>
           </a:xfrm>
           <a:prstGeom prst="rect">
@@ -4481,6 +4487,152 @@
           </a:prstGeom>
         </p:spPr>
       </p:pic>
+      <p:pic>
+        <p:nvPicPr>
+          <p:cNvPr id="2050" name="Picture 2" descr="9+ Thousand Golf Ball Drawing Royalty ...">
+            <a:extLst>
+              <a:ext uri="{FF2B5EF4-FFF2-40B4-BE49-F238E27FC236}">
+                <a16:creationId xmlns:a16="http://schemas.microsoft.com/office/drawing/2014/main" id="{74799B9D-930E-6D3E-2541-A8DA7D2C3907}"/>
+              </a:ext>
+            </a:extLst>
+          </p:cNvPr>
+          <p:cNvPicPr>
+            <a:picLocks noChangeAspect="1" noChangeArrowheads="1"/>
+          </p:cNvPicPr>
+          <p:nvPr/>
+        </p:nvPicPr>
+        <p:blipFill rotWithShape="1">
+          <a:blip r:embed="rId3">
+            <a:extLst>
+              <a:ext uri="{28A0092B-C50C-407E-A947-70E740481C1C}">
+                <a14:useLocalDpi xmlns:a14="http://schemas.microsoft.com/office/drawing/2010/main" val="0"/>
+              </a:ext>
+            </a:extLst>
+          </a:blip>
+          <a:srcRect l="11874" t="11221" r="11002" b="16675"/>
+          <a:stretch>
+            <a:fillRect/>
+          </a:stretch>
+        </p:blipFill>
+        <p:spPr bwMode="auto">
+          <a:xfrm>
+            <a:off x="6096000" y="3684496"/>
+            <a:ext cx="748553" cy="754898"/>
+          </a:xfrm>
+          <a:prstGeom prst="rect">
+            <a:avLst/>
+          </a:prstGeom>
+          <a:noFill/>
+          <a:extLst>
+            <a:ext uri="{909E8E84-426E-40DD-AFC4-6F175D3DCCD1}">
+              <a14:hiddenFill xmlns:a14="http://schemas.microsoft.com/office/drawing/2010/main">
+                <a:solidFill>
+                  <a:srgbClr val="FFFFFF"/>
+                </a:solidFill>
+              </a14:hiddenFill>
+            </a:ext>
+          </a:extLst>
+        </p:spPr>
+      </p:pic>
+      <p:sp>
+        <p:nvSpPr>
+          <p:cNvPr id="4" name="Oval 3">
+            <a:extLst>
+              <a:ext uri="{FF2B5EF4-FFF2-40B4-BE49-F238E27FC236}">
+                <a16:creationId xmlns:a16="http://schemas.microsoft.com/office/drawing/2014/main" id="{928BB091-FD15-FAF3-576D-585AAA561545}"/>
+              </a:ext>
+            </a:extLst>
+          </p:cNvPr>
+          <p:cNvSpPr/>
+          <p:nvPr/>
+        </p:nvSpPr>
+        <p:spPr>
+          <a:xfrm>
+            <a:off x="6105338" y="3684496"/>
+            <a:ext cx="729876" cy="729876"/>
+          </a:xfrm>
+          <a:prstGeom prst="ellipse">
+            <a:avLst/>
+          </a:prstGeom>
+          <a:noFill/>
+          <a:ln w="57150"/>
+        </p:spPr>
+        <p:style>
+          <a:lnRef idx="2">
+            <a:schemeClr val="dk1">
+              <a:shade val="15000"/>
+            </a:schemeClr>
+          </a:lnRef>
+          <a:fillRef idx="1">
+            <a:schemeClr val="dk1"/>
+          </a:fillRef>
+          <a:effectRef idx="0">
+            <a:schemeClr val="dk1"/>
+          </a:effectRef>
+          <a:fontRef idx="minor">
+            <a:schemeClr val="lt1"/>
+          </a:fontRef>
+        </p:style>
+        <p:txBody>
+          <a:bodyPr rtlCol="0" anchor="ctr"/>
+          <a:lstStyle/>
+          <a:p>
+            <a:pPr algn="ctr"/>
+            <a:endParaRPr lang="en-US"/>
+          </a:p>
+        </p:txBody>
+      </p:sp>
+      <p:sp>
+        <p:nvSpPr>
+          <p:cNvPr id="3" name="Oval 2">
+            <a:extLst>
+              <a:ext uri="{FF2B5EF4-FFF2-40B4-BE49-F238E27FC236}">
+                <a16:creationId xmlns:a16="http://schemas.microsoft.com/office/drawing/2014/main" id="{CB4A0E27-9336-A050-604E-F6C9B932EB0C}"/>
+              </a:ext>
+            </a:extLst>
+          </p:cNvPr>
+          <p:cNvSpPr/>
+          <p:nvPr/>
+        </p:nvSpPr>
+        <p:spPr>
+          <a:xfrm>
+            <a:off x="6096000" y="3684496"/>
+            <a:ext cx="729876" cy="729876"/>
+          </a:xfrm>
+          <a:prstGeom prst="ellipse">
+            <a:avLst/>
+          </a:prstGeom>
+          <a:solidFill>
+            <a:srgbClr val="000000">
+              <a:alpha val="40000"/>
+            </a:srgbClr>
+          </a:solidFill>
+        </p:spPr>
+        <p:style>
+          <a:lnRef idx="2">
+            <a:schemeClr val="dk1">
+              <a:shade val="15000"/>
+            </a:schemeClr>
+          </a:lnRef>
+          <a:fillRef idx="1">
+            <a:schemeClr val="dk1"/>
+          </a:fillRef>
+          <a:effectRef idx="0">
+            <a:schemeClr val="dk1"/>
+          </a:effectRef>
+          <a:fontRef idx="minor">
+            <a:schemeClr val="lt1"/>
+          </a:fontRef>
+        </p:style>
+        <p:txBody>
+          <a:bodyPr rtlCol="0" anchor="ctr"/>
+          <a:lstStyle/>
+          <a:p>
+            <a:pPr algn="ctr"/>
+            <a:endParaRPr lang="en-US"/>
+          </a:p>
+        </p:txBody>
+      </p:sp>
     </p:spTree>
     <p:extLst>
       <p:ext uri="{BB962C8B-B14F-4D97-AF65-F5344CB8AC3E}">
@@ -4495,6 +4647,416 @@
 </file>
 
 <file path=ppt/slides/slide3.xml><?xml version="1.0" encoding="utf-8"?>
+<p:sld xmlns:a="http://schemas.openxmlformats.org/drawingml/2006/main" xmlns:r="http://schemas.openxmlformats.org/officeDocument/2006/relationships" xmlns:p="http://schemas.openxmlformats.org/presentationml/2006/main">
+  <p:cSld>
+    <p:spTree>
+      <p:nvGrpSpPr>
+        <p:cNvPr id="1" name=""/>
+        <p:cNvGrpSpPr/>
+        <p:nvPr/>
+      </p:nvGrpSpPr>
+      <p:grpSpPr>
+        <a:xfrm>
+          <a:off x="0" y="0"/>
+          <a:ext cx="0" cy="0"/>
+          <a:chOff x="0" y="0"/>
+          <a:chExt cx="0" cy="0"/>
+        </a:xfrm>
+      </p:grpSpPr>
+      <p:pic>
+        <p:nvPicPr>
+          <p:cNvPr id="1030" name="Picture 6" descr="Complete Golf Club Sets &amp; Junior Golf Clubs | Callaway Golf">
+            <a:extLst>
+              <a:ext uri="{FF2B5EF4-FFF2-40B4-BE49-F238E27FC236}">
+                <a16:creationId xmlns:a16="http://schemas.microsoft.com/office/drawing/2014/main" id="{1D34DA1C-96E3-D539-41EE-57A436D7FD17}"/>
+              </a:ext>
+            </a:extLst>
+          </p:cNvPr>
+          <p:cNvPicPr>
+            <a:picLocks noChangeAspect="1" noChangeArrowheads="1"/>
+          </p:cNvPicPr>
+          <p:nvPr/>
+        </p:nvPicPr>
+        <p:blipFill>
+          <a:blip r:embed="rId2">
+            <a:extLst>
+              <a:ext uri="{28A0092B-C50C-407E-A947-70E740481C1C}">
+                <a14:useLocalDpi xmlns:a14="http://schemas.microsoft.com/office/drawing/2010/main" val="0"/>
+              </a:ext>
+            </a:extLst>
+          </a:blip>
+          <a:srcRect/>
+          <a:stretch>
+            <a:fillRect/>
+          </a:stretch>
+        </p:blipFill>
+        <p:spPr bwMode="auto">
+          <a:xfrm rot="5400000">
+            <a:off x="3903568" y="-117103"/>
+            <a:ext cx="5088031" cy="6226549"/>
+          </a:xfrm>
+          <a:prstGeom prst="rect">
+            <a:avLst/>
+          </a:prstGeom>
+          <a:noFill/>
+          <a:extLst>
+            <a:ext uri="{909E8E84-426E-40DD-AFC4-6F175D3DCCD1}">
+              <a14:hiddenFill xmlns:a14="http://schemas.microsoft.com/office/drawing/2010/main">
+                <a:solidFill>
+                  <a:srgbClr val="FFFFFF"/>
+                </a:solidFill>
+              </a14:hiddenFill>
+            </a:ext>
+          </a:extLst>
+        </p:spPr>
+      </p:pic>
+      <p:sp>
+        <p:nvSpPr>
+          <p:cNvPr id="2" name="Rectangle 1">
+            <a:extLst>
+              <a:ext uri="{FF2B5EF4-FFF2-40B4-BE49-F238E27FC236}">
+                <a16:creationId xmlns:a16="http://schemas.microsoft.com/office/drawing/2014/main" id="{0AD10310-CB2F-E8CB-9CD0-BF94BDD70E39}"/>
+              </a:ext>
+            </a:extLst>
+          </p:cNvPr>
+          <p:cNvSpPr/>
+          <p:nvPr/>
+        </p:nvSpPr>
+        <p:spPr>
+          <a:xfrm>
+            <a:off x="2743200" y="1990165"/>
+            <a:ext cx="820271" cy="2097741"/>
+          </a:xfrm>
+          <a:prstGeom prst="rect">
+            <a:avLst/>
+          </a:prstGeom>
+          <a:solidFill>
+            <a:schemeClr val="bg1"/>
+          </a:solidFill>
+          <a:ln>
+            <a:solidFill>
+              <a:schemeClr val="bg1"/>
+            </a:solidFill>
+          </a:ln>
+        </p:spPr>
+        <p:style>
+          <a:lnRef idx="2">
+            <a:schemeClr val="accent1">
+              <a:shade val="15000"/>
+            </a:schemeClr>
+          </a:lnRef>
+          <a:fillRef idx="1">
+            <a:schemeClr val="accent1"/>
+          </a:fillRef>
+          <a:effectRef idx="0">
+            <a:schemeClr val="accent1"/>
+          </a:effectRef>
+          <a:fontRef idx="minor">
+            <a:schemeClr val="lt1"/>
+          </a:fontRef>
+        </p:style>
+        <p:txBody>
+          <a:bodyPr rtlCol="0" anchor="ctr"/>
+          <a:lstStyle/>
+          <a:p>
+            <a:pPr algn="ctr"/>
+            <a:endParaRPr lang="en-US"/>
+          </a:p>
+        </p:txBody>
+      </p:sp>
+      <p:sp>
+        <p:nvSpPr>
+          <p:cNvPr id="4" name="Freeform: Shape 3">
+            <a:extLst>
+              <a:ext uri="{FF2B5EF4-FFF2-40B4-BE49-F238E27FC236}">
+                <a16:creationId xmlns:a16="http://schemas.microsoft.com/office/drawing/2014/main" id="{460B39D6-DE68-9553-EAD3-79FFA0AFDC07}"/>
+              </a:ext>
+            </a:extLst>
+          </p:cNvPr>
+          <p:cNvSpPr/>
+          <p:nvPr/>
+        </p:nvSpPr>
+        <p:spPr>
+          <a:xfrm>
+            <a:off x="3334309" y="2117486"/>
+            <a:ext cx="648183" cy="648863"/>
+          </a:xfrm>
+          <a:custGeom>
+            <a:avLst/>
+            <a:gdLst>
+              <a:gd name="connsiteX0" fmla="*/ 34724 w 648183"/>
+              <a:gd name="connsiteY0" fmla="*/ 439838 h 439838"/>
+              <a:gd name="connsiteX1" fmla="*/ 648183 w 648183"/>
+              <a:gd name="connsiteY1" fmla="*/ 0 h 439838"/>
+              <a:gd name="connsiteX2" fmla="*/ 0 w 648183"/>
+              <a:gd name="connsiteY2" fmla="*/ 46299 h 439838"/>
+              <a:gd name="connsiteX3" fmla="*/ 34724 w 648183"/>
+              <a:gd name="connsiteY3" fmla="*/ 439838 h 439838"/>
+            </a:gdLst>
+            <a:ahLst/>
+            <a:cxnLst>
+              <a:cxn ang="0">
+                <a:pos x="connsiteX0" y="connsiteY0"/>
+              </a:cxn>
+              <a:cxn ang="0">
+                <a:pos x="connsiteX1" y="connsiteY1"/>
+              </a:cxn>
+              <a:cxn ang="0">
+                <a:pos x="connsiteX2" y="connsiteY2"/>
+              </a:cxn>
+              <a:cxn ang="0">
+                <a:pos x="connsiteX3" y="connsiteY3"/>
+              </a:cxn>
+            </a:cxnLst>
+            <a:rect l="l" t="t" r="r" b="b"/>
+            <a:pathLst>
+              <a:path w="648183" h="439838">
+                <a:moveTo>
+                  <a:pt x="34724" y="439838"/>
+                </a:moveTo>
+                <a:lnTo>
+                  <a:pt x="648183" y="0"/>
+                </a:lnTo>
+                <a:lnTo>
+                  <a:pt x="0" y="46299"/>
+                </a:lnTo>
+                <a:lnTo>
+                  <a:pt x="34724" y="439838"/>
+                </a:lnTo>
+                <a:close/>
+              </a:path>
+            </a:pathLst>
+          </a:custGeom>
+          <a:solidFill>
+            <a:schemeClr val="bg1"/>
+          </a:solidFill>
+          <a:ln>
+            <a:solidFill>
+              <a:schemeClr val="bg1"/>
+            </a:solidFill>
+          </a:ln>
+        </p:spPr>
+        <p:style>
+          <a:lnRef idx="2">
+            <a:schemeClr val="accent1">
+              <a:shade val="15000"/>
+            </a:schemeClr>
+          </a:lnRef>
+          <a:fillRef idx="1">
+            <a:schemeClr val="accent1"/>
+          </a:fillRef>
+          <a:effectRef idx="0">
+            <a:schemeClr val="accent1"/>
+          </a:effectRef>
+          <a:fontRef idx="minor">
+            <a:schemeClr val="lt1"/>
+          </a:fontRef>
+        </p:style>
+        <p:txBody>
+          <a:bodyPr rtlCol="0" anchor="ctr"/>
+          <a:lstStyle/>
+          <a:p>
+            <a:pPr algn="ctr"/>
+            <a:endParaRPr lang="en-US"/>
+          </a:p>
+        </p:txBody>
+      </p:sp>
+      <p:sp>
+        <p:nvSpPr>
+          <p:cNvPr id="5" name="Freeform: Shape 4">
+            <a:extLst>
+              <a:ext uri="{FF2B5EF4-FFF2-40B4-BE49-F238E27FC236}">
+                <a16:creationId xmlns:a16="http://schemas.microsoft.com/office/drawing/2014/main" id="{93439A05-6ACA-D382-F8A5-BEE0968A90B9}"/>
+              </a:ext>
+            </a:extLst>
+          </p:cNvPr>
+          <p:cNvSpPr/>
+          <p:nvPr/>
+        </p:nvSpPr>
+        <p:spPr>
+          <a:xfrm flipV="1">
+            <a:off x="3334309" y="3102696"/>
+            <a:ext cx="648183" cy="648863"/>
+          </a:xfrm>
+          <a:custGeom>
+            <a:avLst/>
+            <a:gdLst>
+              <a:gd name="connsiteX0" fmla="*/ 34724 w 648183"/>
+              <a:gd name="connsiteY0" fmla="*/ 439838 h 439838"/>
+              <a:gd name="connsiteX1" fmla="*/ 648183 w 648183"/>
+              <a:gd name="connsiteY1" fmla="*/ 0 h 439838"/>
+              <a:gd name="connsiteX2" fmla="*/ 0 w 648183"/>
+              <a:gd name="connsiteY2" fmla="*/ 46299 h 439838"/>
+              <a:gd name="connsiteX3" fmla="*/ 34724 w 648183"/>
+              <a:gd name="connsiteY3" fmla="*/ 439838 h 439838"/>
+            </a:gdLst>
+            <a:ahLst/>
+            <a:cxnLst>
+              <a:cxn ang="0">
+                <a:pos x="connsiteX0" y="connsiteY0"/>
+              </a:cxn>
+              <a:cxn ang="0">
+                <a:pos x="connsiteX1" y="connsiteY1"/>
+              </a:cxn>
+              <a:cxn ang="0">
+                <a:pos x="connsiteX2" y="connsiteY2"/>
+              </a:cxn>
+              <a:cxn ang="0">
+                <a:pos x="connsiteX3" y="connsiteY3"/>
+              </a:cxn>
+            </a:cxnLst>
+            <a:rect l="l" t="t" r="r" b="b"/>
+            <a:pathLst>
+              <a:path w="648183" h="439838">
+                <a:moveTo>
+                  <a:pt x="34724" y="439838"/>
+                </a:moveTo>
+                <a:lnTo>
+                  <a:pt x="648183" y="0"/>
+                </a:lnTo>
+                <a:lnTo>
+                  <a:pt x="0" y="46299"/>
+                </a:lnTo>
+                <a:lnTo>
+                  <a:pt x="34724" y="439838"/>
+                </a:lnTo>
+                <a:close/>
+              </a:path>
+            </a:pathLst>
+          </a:custGeom>
+          <a:solidFill>
+            <a:schemeClr val="bg1"/>
+          </a:solidFill>
+          <a:ln>
+            <a:solidFill>
+              <a:schemeClr val="bg1"/>
+            </a:solidFill>
+          </a:ln>
+        </p:spPr>
+        <p:style>
+          <a:lnRef idx="2">
+            <a:schemeClr val="accent1">
+              <a:shade val="15000"/>
+            </a:schemeClr>
+          </a:lnRef>
+          <a:fillRef idx="1">
+            <a:schemeClr val="accent1"/>
+          </a:fillRef>
+          <a:effectRef idx="0">
+            <a:schemeClr val="accent1"/>
+          </a:effectRef>
+          <a:fontRef idx="minor">
+            <a:schemeClr val="lt1"/>
+          </a:fontRef>
+        </p:style>
+        <p:txBody>
+          <a:bodyPr rtlCol="0" anchor="ctr"/>
+          <a:lstStyle/>
+          <a:p>
+            <a:pPr algn="ctr"/>
+            <a:endParaRPr lang="en-US"/>
+          </a:p>
+        </p:txBody>
+      </p:sp>
+      <p:sp>
+        <p:nvSpPr>
+          <p:cNvPr id="6" name="TextBox 5">
+            <a:extLst>
+              <a:ext uri="{FF2B5EF4-FFF2-40B4-BE49-F238E27FC236}">
+                <a16:creationId xmlns:a16="http://schemas.microsoft.com/office/drawing/2014/main" id="{41AF495F-626B-DB66-403C-4B67F95A0792}"/>
+              </a:ext>
+            </a:extLst>
+          </p:cNvPr>
+          <p:cNvSpPr txBox="1"/>
+          <p:nvPr/>
+        </p:nvSpPr>
+        <p:spPr>
+          <a:xfrm>
+            <a:off x="3641246" y="4099481"/>
+            <a:ext cx="5731056" cy="830997"/>
+          </a:xfrm>
+          <a:prstGeom prst="rect">
+            <a:avLst/>
+          </a:prstGeom>
+          <a:noFill/>
+        </p:spPr>
+        <p:txBody>
+          <a:bodyPr wrap="none" rtlCol="0">
+            <a:spAutoFit/>
+          </a:bodyPr>
+          <a:lstStyle/>
+          <a:p>
+            <a:pPr algn="ctr"/>
+            <a:r>
+              <a:rPr lang="en-US" sz="4800" b="1" dirty="0">
+                <a:latin typeface="Aharoni" panose="02010803020104030203" pitchFamily="2" charset="-79"/>
+                <a:cs typeface="Aharoni" panose="02010803020104030203" pitchFamily="2" charset="-79"/>
+              </a:rPr>
+              <a:t>COME AND TAKE IT</a:t>
+            </a:r>
+          </a:p>
+        </p:txBody>
+      </p:sp>
+      <p:sp>
+        <p:nvSpPr>
+          <p:cNvPr id="7" name="Star: 5 Points 6">
+            <a:extLst>
+              <a:ext uri="{FF2B5EF4-FFF2-40B4-BE49-F238E27FC236}">
+                <a16:creationId xmlns:a16="http://schemas.microsoft.com/office/drawing/2014/main" id="{71AAB63E-F65A-9436-76F2-7F0B98CCE9FD}"/>
+              </a:ext>
+            </a:extLst>
+          </p:cNvPr>
+          <p:cNvSpPr/>
+          <p:nvPr/>
+        </p:nvSpPr>
+        <p:spPr>
+          <a:xfrm>
+            <a:off x="5793613" y="682226"/>
+            <a:ext cx="1307939" cy="1307939"/>
+          </a:xfrm>
+          <a:prstGeom prst="star5">
+            <a:avLst/>
+          </a:prstGeom>
+        </p:spPr>
+        <p:style>
+          <a:lnRef idx="2">
+            <a:schemeClr val="dk1">
+              <a:shade val="15000"/>
+            </a:schemeClr>
+          </a:lnRef>
+          <a:fillRef idx="1">
+            <a:schemeClr val="dk1"/>
+          </a:fillRef>
+          <a:effectRef idx="0">
+            <a:schemeClr val="dk1"/>
+          </a:effectRef>
+          <a:fontRef idx="minor">
+            <a:schemeClr val="lt1"/>
+          </a:fontRef>
+        </p:style>
+        <p:txBody>
+          <a:bodyPr rtlCol="0" anchor="ctr"/>
+          <a:lstStyle/>
+          <a:p>
+            <a:pPr algn="ctr"/>
+            <a:endParaRPr lang="en-US"/>
+          </a:p>
+        </p:txBody>
+      </p:sp>
+    </p:spTree>
+    <p:extLst>
+      <p:ext uri="{BB962C8B-B14F-4D97-AF65-F5344CB8AC3E}">
+        <p14:creationId xmlns:p14="http://schemas.microsoft.com/office/powerpoint/2010/main" val="1180341517"/>
+      </p:ext>
+    </p:extLst>
+  </p:cSld>
+  <p:clrMapOvr>
+    <a:masterClrMapping/>
+  </p:clrMapOvr>
+</p:sld>
+</file>
+
+<file path=ppt/slides/slide4.xml><?xml version="1.0" encoding="utf-8"?>
 <p:sld xmlns:a="http://schemas.openxmlformats.org/drawingml/2006/main" xmlns:r="http://schemas.openxmlformats.org/officeDocument/2006/relationships" xmlns:p="http://schemas.openxmlformats.org/presentationml/2006/main">
   <p:cSld>
     <p:spTree>
